--- a/Data_Science_Capstone_Presentation_12.pptx
+++ b/Data_Science_Capstone_Presentation_12.pptx
@@ -2022,8 +2022,8 @@
         </p:nvSpPr>
         <p:spPr>
           <a:xfrm>
-            <a:off x="731520" y="4343400"/>
-            <a:ext cx="10424160" cy="822960"/>
+            <a:off x="731520" y="4297680"/>
+            <a:ext cx="10607040" cy="1371600"/>
           </a:xfrm>
           <a:prstGeom prst="rect">
             <a:avLst/>
@@ -2037,19 +2037,19 @@
           <a:p>
             <a:pPr indent="0" marL="0">
               <a:lnSpc>
-                <a:spcPts val="2000"/>
+                <a:spcPts val="1800"/>
               </a:lnSpc>
               <a:buNone/>
             </a:pPr>
             <a:r>
-              <a:rPr lang="en-US" sz="1300" dirty="0">
+              <a:rPr lang="en-US" sz="1250" dirty="0">
                 <a:solidFill>
                   <a:srgbClr val="AAB4C8"/>
                 </a:solidFill>
               </a:rPr>
-              <a:t>Contains all completed notebooks, Python scripts (data collection, web scraping, wrangling, EDA, SQL, Folium, ML modeling) and the Plotly Dash dashboard app referenced in this presentation.</a:t>
-            </a:r>
-            <a:endParaRPr lang="en-US" sz="1300" dirty="0"/>
+              <a:t>Contains all completed notebooks, Python scripts (data collection, web scraping, wrangling, EDA, SQL, Folium, ML modeling) and the Plotly Dash dashboard app referenced in this presentation. This PDF is the completed presentation itself: 12 slides covering Executive Summary, Introduction, Data Collection, Data Wrangling, EDA with Visualization, EDA with SQL, Folium Map, Plotly Dash, Predictive Analysis results and Conclusion, each with charts, tables and analysis.</a:t>
+            </a:r>
+            <a:endParaRPr lang="en-US" sz="1250" dirty="0"/>
           </a:p>
         </p:txBody>
       </p:sp>
@@ -2358,24 +2358,41 @@
         </p:nvSpPr>
         <p:spPr>
           <a:xfrm>
-            <a:off x="457200" y="6473952"/>
-            <a:ext cx="11247120" cy="274320"/>
-          </a:xfrm>
-          <a:prstGeom prst="rect">
-            <a:avLst/>
-          </a:prstGeom>
-          <a:noFill/>
-          <a:ln/>
-        </p:spPr>
-        <p:txBody>
-          <a:bodyPr wrap="square" rtlCol="0" anchor="ctr"/>
-          <a:lstStyle/>
-          <a:p>
-            <a:pPr indent="0" marL="0">
-              <a:buNone/>
-            </a:pPr>
-            <a:r>
-              <a:rPr lang="en-US" sz="1050" b="1" dirty="0">
+            <a:off x="457200" y="6291072"/>
+            <a:ext cx="11247120" cy="475488"/>
+          </a:xfrm>
+          <a:prstGeom prst="rect">
+            <a:avLst/>
+          </a:prstGeom>
+          <a:noFill/>
+          <a:ln/>
+        </p:spPr>
+        <p:txBody>
+          <a:bodyPr wrap="square" rtlCol="0" anchor="ctr"/>
+          <a:lstStyle/>
+          <a:p>
+            <a:pPr indent="0" marL="0">
+              <a:lnSpc>
+                <a:spcPts val="1200"/>
+              </a:lnSpc>
+              <a:buNone/>
+            </a:pPr>
+            <a:r>
+              <a:rPr lang="en-US" sz="950" dirty="0">
+                <a:solidFill>
+                  <a:srgbClr val="0B1F3A"/>
+                </a:solidFill>
+              </a:rPr>
+              <a:t>Plotly Dash slide: launch-site dropdown driving a live success-rate pie chart and a payload-versus-outcome scatter plot recoloured by booster version.  </a:t>
+            </a:r>
+            <a:pPr indent="0" marL="0">
+              <a:lnSpc>
+                <a:spcPts val="1200"/>
+              </a:lnSpc>
+              <a:buNone/>
+            </a:pPr>
+            <a:r>
+              <a:rPr lang="en-US" sz="950" b="1" dirty="0">
                 <a:solidFill>
                   <a:srgbClr val="5B6472"/>
                 </a:solidFill>
@@ -2383,10 +2400,13 @@
               <a:t>GitHub repository: </a:t>
             </a:r>
             <a:pPr indent="0" marL="0">
-              <a:buNone/>
-            </a:pPr>
-            <a:r>
-              <a:rPr lang="en-US" sz="1050" u="sng" dirty="0">
+              <a:lnSpc>
+                <a:spcPts val="1200"/>
+              </a:lnSpc>
+              <a:buNone/>
+            </a:pPr>
+            <a:r>
+              <a:rPr lang="en-US" sz="950" u="sng" dirty="0">
                 <a:solidFill>
                   <a:srgbClr val="3B60E4"/>
                 </a:solidFill>
@@ -2400,7 +2420,7 @@
               </a:rPr>
               <a:t>https://github.com/razerblade09/spacex-falcon9-capstone/blob/main/dashboard/app.py</a:t>
             </a:r>
-            <a:endParaRPr lang="en-US" sz="1050" dirty="0"/>
+            <a:endParaRPr lang="en-US" sz="950" dirty="0"/>
           </a:p>
         </p:txBody>
       </p:sp>
@@ -3706,24 +3726,41 @@
         </p:nvSpPr>
         <p:spPr>
           <a:xfrm>
-            <a:off x="457200" y="6473952"/>
-            <a:ext cx="11247120" cy="274320"/>
-          </a:xfrm>
-          <a:prstGeom prst="rect">
-            <a:avLst/>
-          </a:prstGeom>
-          <a:noFill/>
-          <a:ln/>
-        </p:spPr>
-        <p:txBody>
-          <a:bodyPr wrap="square" rtlCol="0" anchor="ctr"/>
-          <a:lstStyle/>
-          <a:p>
-            <a:pPr indent="0" marL="0">
-              <a:buNone/>
-            </a:pPr>
-            <a:r>
-              <a:rPr lang="en-US" sz="1050" b="1" dirty="0">
+            <a:off x="457200" y="6291072"/>
+            <a:ext cx="11247120" cy="475488"/>
+          </a:xfrm>
+          <a:prstGeom prst="rect">
+            <a:avLst/>
+          </a:prstGeom>
+          <a:noFill/>
+          <a:ln/>
+        </p:spPr>
+        <p:txBody>
+          <a:bodyPr wrap="square" rtlCol="0" anchor="ctr"/>
+          <a:lstStyle/>
+          <a:p>
+            <a:pPr indent="0" marL="0">
+              <a:lnSpc>
+                <a:spcPts val="1200"/>
+              </a:lnSpc>
+              <a:buNone/>
+            </a:pPr>
+            <a:r>
+              <a:rPr lang="en-US" sz="950" dirty="0">
+                <a:solidFill>
+                  <a:srgbClr val="0B1F3A"/>
+                </a:solidFill>
+              </a:rPr>
+              <a:t>Predictive Analysis slide: four classifiers tuned by 10-fold GridSearchCV; Logistic Regression, SVM and KNN reach 83.3% test accuracy with a 12/3/3/0 confusion matrix.  </a:t>
+            </a:r>
+            <a:pPr indent="0" marL="0">
+              <a:lnSpc>
+                <a:spcPts val="1200"/>
+              </a:lnSpc>
+              <a:buNone/>
+            </a:pPr>
+            <a:r>
+              <a:rPr lang="en-US" sz="950" b="1" dirty="0">
                 <a:solidFill>
                   <a:srgbClr val="5B6472"/>
                 </a:solidFill>
@@ -3731,10 +3768,13 @@
               <a:t>GitHub repository: </a:t>
             </a:r>
             <a:pPr indent="0" marL="0">
-              <a:buNone/>
-            </a:pPr>
-            <a:r>
-              <a:rPr lang="en-US" sz="1050" u="sng" dirty="0">
+              <a:lnSpc>
+                <a:spcPts val="1200"/>
+              </a:lnSpc>
+              <a:buNone/>
+            </a:pPr>
+            <a:r>
+              <a:rPr lang="en-US" sz="950" u="sng" dirty="0">
                 <a:solidFill>
                   <a:srgbClr val="3B60E4"/>
                 </a:solidFill>
@@ -3748,7 +3788,7 @@
               </a:rPr>
               <a:t>https://github.com/razerblade09/spacex-falcon9-capstone/blob/main/notebooks/04_07_eda_sql_ml.py</a:t>
             </a:r>
-            <a:endParaRPr lang="en-US" sz="1050" dirty="0"/>
+            <a:endParaRPr lang="en-US" sz="950" dirty="0"/>
           </a:p>
         </p:txBody>
       </p:sp>
@@ -4476,34 +4516,54 @@
         <p:spPr>
           <a:xfrm>
             <a:off x="457200" y="6035040"/>
-            <a:ext cx="11247120" cy="320040"/>
-          </a:xfrm>
-          <a:prstGeom prst="rect">
-            <a:avLst/>
-          </a:prstGeom>
-          <a:noFill/>
-          <a:ln/>
-        </p:spPr>
-        <p:txBody>
-          <a:bodyPr wrap="square" rtlCol="0" anchor="ctr"/>
-          <a:lstStyle/>
-          <a:p>
-            <a:pPr indent="0" marL="0">
-              <a:buNone/>
-            </a:pPr>
-            <a:r>
-              <a:rPr lang="en-US" sz="1250" b="1" dirty="0">
+            <a:ext cx="11247120" cy="502920"/>
+          </a:xfrm>
+          <a:prstGeom prst="rect">
+            <a:avLst/>
+          </a:prstGeom>
+          <a:noFill/>
+          <a:ln/>
+        </p:spPr>
+        <p:txBody>
+          <a:bodyPr wrap="square" rtlCol="0" anchor="ctr"/>
+          <a:lstStyle/>
+          <a:p>
+            <a:pPr indent="0" marL="0">
+              <a:lnSpc>
+                <a:spcPts val="1200"/>
+              </a:lnSpc>
+              <a:buNone/>
+            </a:pPr>
+            <a:r>
+              <a:rPr lang="en-US" sz="950" dirty="0">
+                <a:solidFill>
+                  <a:srgbClr val="0B1F3A"/>
+                </a:solidFill>
+              </a:rPr>
+              <a:t>Conclusion slide of the completed 12-slide presentation: Logistic Regression selected at 83.3% test accuracy, orbit type and payload mass the strongest predictors, success improving year over year.  </a:t>
+            </a:r>
+            <a:pPr indent="0" marL="0">
+              <a:lnSpc>
+                <a:spcPts val="1200"/>
+              </a:lnSpc>
+              <a:buNone/>
+            </a:pPr>
+            <a:r>
+              <a:rPr lang="en-US" sz="950" b="1" dirty="0">
                 <a:solidFill>
                   <a:srgbClr val="5B6472"/>
                 </a:solidFill>
               </a:rPr>
-              <a:t>Full code, notebooks, and dashboard app:   </a:t>
-            </a:r>
-            <a:pPr indent="0" marL="0">
-              <a:buNone/>
-            </a:pPr>
-            <a:r>
-              <a:rPr lang="en-US" sz="1250" u="sng" dirty="0">
+              <a:t>Full code, notebooks, and dashboard app: </a:t>
+            </a:r>
+            <a:pPr indent="0" marL="0">
+              <a:lnSpc>
+                <a:spcPts val="1200"/>
+              </a:lnSpc>
+              <a:buNone/>
+            </a:pPr>
+            <a:r>
+              <a:rPr lang="en-US" sz="950" u="sng" dirty="0">
                 <a:solidFill>
                   <a:srgbClr val="3B60E4"/>
                 </a:solidFill>
@@ -4517,7 +4577,7 @@
               </a:rPr>
               <a:t>https://github.com/razerblade09/spacex-falcon9-capstone</a:t>
             </a:r>
-            <a:endParaRPr lang="en-US" sz="1250" dirty="0"/>
+            <a:endParaRPr lang="en-US" sz="950" dirty="0"/>
           </a:p>
         </p:txBody>
       </p:sp>
@@ -4663,7 +4723,7 @@
         <p:spPr>
           <a:xfrm>
             <a:off x="457200" y="1298448"/>
-            <a:ext cx="11247120" cy="292608"/>
+            <a:ext cx="11247120" cy="310896"/>
           </a:xfrm>
           <a:prstGeom prst="rect">
             <a:avLst/>
@@ -4713,7 +4773,7 @@
                   <a:srgbClr val="5B6472"/>
                 </a:solidFill>
               </a:rPr>
-              <a:t>  (all notebooks, scripts, and dashboard code)</a:t>
+              <a:t>  (all notebooks, scripts, and dashboard code). 90 launches analysed, 66.7% landing success, 83.3% best-model test accuracy across the completed slides that follow.</a:t>
             </a:r>
             <a:endParaRPr lang="en-US" sz="1150" dirty="0"/>
           </a:p>
@@ -6431,24 +6491,41 @@
         </p:nvSpPr>
         <p:spPr>
           <a:xfrm>
-            <a:off x="457200" y="6473952"/>
-            <a:ext cx="11247120" cy="274320"/>
-          </a:xfrm>
-          <a:prstGeom prst="rect">
-            <a:avLst/>
-          </a:prstGeom>
-          <a:noFill/>
-          <a:ln/>
-        </p:spPr>
-        <p:txBody>
-          <a:bodyPr wrap="square" rtlCol="0" anchor="ctr"/>
-          <a:lstStyle/>
-          <a:p>
-            <a:pPr indent="0" marL="0">
-              <a:buNone/>
-            </a:pPr>
-            <a:r>
-              <a:rPr lang="en-US" sz="1050" b="1" dirty="0">
+            <a:off x="457200" y="6291072"/>
+            <a:ext cx="11247120" cy="475488"/>
+          </a:xfrm>
+          <a:prstGeom prst="rect">
+            <a:avLst/>
+          </a:prstGeom>
+          <a:noFill/>
+          <a:ln/>
+        </p:spPr>
+        <p:txBody>
+          <a:bodyPr wrap="square" rtlCol="0" anchor="ctr"/>
+          <a:lstStyle/>
+          <a:p>
+            <a:pPr indent="0" marL="0">
+              <a:lnSpc>
+                <a:spcPts val="1200"/>
+              </a:lnSpc>
+              <a:buNone/>
+            </a:pPr>
+            <a:r>
+              <a:rPr lang="en-US" sz="950" dirty="0">
+                <a:solidFill>
+                  <a:srgbClr val="0B1F3A"/>
+                </a:solidFill>
+              </a:rPr>
+              <a:t>Data Collection – SpaceX API slide: 90 clean Falcon 9 launch records assembled from /v4/launches/past enriched by the /rockets, /launchpads, /payloads and /cores endpoints.  </a:t>
+            </a:r>
+            <a:pPr indent="0" marL="0">
+              <a:lnSpc>
+                <a:spcPts val="1200"/>
+              </a:lnSpc>
+              <a:buNone/>
+            </a:pPr>
+            <a:r>
+              <a:rPr lang="en-US" sz="950" b="1" dirty="0">
                 <a:solidFill>
                   <a:srgbClr val="5B6472"/>
                 </a:solidFill>
@@ -6456,10 +6533,13 @@
               <a:t>GitHub repository: </a:t>
             </a:r>
             <a:pPr indent="0" marL="0">
-              <a:buNone/>
-            </a:pPr>
-            <a:r>
-              <a:rPr lang="en-US" sz="1050" u="sng" dirty="0">
+              <a:lnSpc>
+                <a:spcPts val="1200"/>
+              </a:lnSpc>
+              <a:buNone/>
+            </a:pPr>
+            <a:r>
+              <a:rPr lang="en-US" sz="950" u="sng" dirty="0">
                 <a:solidFill>
                   <a:srgbClr val="3B60E4"/>
                 </a:solidFill>
@@ -6473,7 +6553,7 @@
               </a:rPr>
               <a:t>https://github.com/razerblade09/spacex-falcon9-capstone/blob/main/notebooks/01_data_collection_api.py</a:t>
             </a:r>
-            <a:endParaRPr lang="en-US" sz="1050" dirty="0"/>
+            <a:endParaRPr lang="en-US" sz="950" dirty="0"/>
           </a:p>
         </p:txBody>
       </p:sp>
@@ -7174,24 +7254,41 @@
         </p:nvSpPr>
         <p:spPr>
           <a:xfrm>
-            <a:off x="457200" y="6473952"/>
-            <a:ext cx="11247120" cy="274320"/>
-          </a:xfrm>
-          <a:prstGeom prst="rect">
-            <a:avLst/>
-          </a:prstGeom>
-          <a:noFill/>
-          <a:ln/>
-        </p:spPr>
-        <p:txBody>
-          <a:bodyPr wrap="square" rtlCol="0" anchor="ctr"/>
-          <a:lstStyle/>
-          <a:p>
-            <a:pPr indent="0" marL="0">
-              <a:buNone/>
-            </a:pPr>
-            <a:r>
-              <a:rPr lang="en-US" sz="1050" b="1" dirty="0">
+            <a:off x="457200" y="6291072"/>
+            <a:ext cx="11247120" cy="475488"/>
+          </a:xfrm>
+          <a:prstGeom prst="rect">
+            <a:avLst/>
+          </a:prstGeom>
+          <a:noFill/>
+          <a:ln/>
+        </p:spPr>
+        <p:txBody>
+          <a:bodyPr wrap="square" rtlCol="0" anchor="ctr"/>
+          <a:lstStyle/>
+          <a:p>
+            <a:pPr indent="0" marL="0">
+              <a:lnSpc>
+                <a:spcPts val="1200"/>
+              </a:lnSpc>
+              <a:buNone/>
+            </a:pPr>
+            <a:r>
+              <a:rPr lang="en-US" sz="950" dirty="0">
+                <a:solidFill>
+                  <a:srgbClr val="0B1F3A"/>
+                </a:solidFill>
+              </a:rPr>
+              <a:t>Data Collection – Web Scraping slide: the Wikipedia Falcon 9 launch tables parsed with BeautifulSoup, cross-checking the API data and supplying the SQL source table.  </a:t>
+            </a:r>
+            <a:pPr indent="0" marL="0">
+              <a:lnSpc>
+                <a:spcPts val="1200"/>
+              </a:lnSpc>
+              <a:buNone/>
+            </a:pPr>
+            <a:r>
+              <a:rPr lang="en-US" sz="950" b="1" dirty="0">
                 <a:solidFill>
                   <a:srgbClr val="5B6472"/>
                 </a:solidFill>
@@ -7199,10 +7296,13 @@
               <a:t>GitHub repository: </a:t>
             </a:r>
             <a:pPr indent="0" marL="0">
-              <a:buNone/>
-            </a:pPr>
-            <a:r>
-              <a:rPr lang="en-US" sz="1050" u="sng" dirty="0">
+              <a:lnSpc>
+                <a:spcPts val="1200"/>
+              </a:lnSpc>
+              <a:buNone/>
+            </a:pPr>
+            <a:r>
+              <a:rPr lang="en-US" sz="950" u="sng" dirty="0">
                 <a:solidFill>
                   <a:srgbClr val="3B60E4"/>
                 </a:solidFill>
@@ -7216,7 +7316,7 @@
               </a:rPr>
               <a:t>https://github.com/razerblade09/spacex-falcon9-capstone/blob/main/notebooks/02_web_scraping.py</a:t>
             </a:r>
-            <a:endParaRPr lang="en-US" sz="1050" dirty="0"/>
+            <a:endParaRPr lang="en-US" sz="950" dirty="0"/>
           </a:p>
         </p:txBody>
       </p:sp>
@@ -7643,24 +7743,41 @@
         </p:nvSpPr>
         <p:spPr>
           <a:xfrm>
-            <a:off x="457200" y="6473952"/>
-            <a:ext cx="11247120" cy="274320"/>
-          </a:xfrm>
-          <a:prstGeom prst="rect">
-            <a:avLst/>
-          </a:prstGeom>
-          <a:noFill/>
-          <a:ln/>
-        </p:spPr>
-        <p:txBody>
-          <a:bodyPr wrap="square" rtlCol="0" anchor="ctr"/>
-          <a:lstStyle/>
-          <a:p>
-            <a:pPr indent="0" marL="0">
-              <a:buNone/>
-            </a:pPr>
-            <a:r>
-              <a:rPr lang="en-US" sz="1050" b="1" dirty="0">
+            <a:off x="457200" y="6291072"/>
+            <a:ext cx="11247120" cy="475488"/>
+          </a:xfrm>
+          <a:prstGeom prst="rect">
+            <a:avLst/>
+          </a:prstGeom>
+          <a:noFill/>
+          <a:ln/>
+        </p:spPr>
+        <p:txBody>
+          <a:bodyPr wrap="square" rtlCol="0" anchor="ctr"/>
+          <a:lstStyle/>
+          <a:p>
+            <a:pPr indent="0" marL="0">
+              <a:lnSpc>
+                <a:spcPts val="1200"/>
+              </a:lnSpc>
+              <a:buNone/>
+            </a:pPr>
+            <a:r>
+              <a:rPr lang="en-US" sz="950" dirty="0">
+                <a:solidFill>
+                  <a:srgbClr val="0B1F3A"/>
+                </a:solidFill>
+              </a:rPr>
+              <a:t>Data Wrangling Methodology slide: PayloadMass mean-imputed at 5.6% missing and the free-text Outcome engineered into a binary Class label — 60 landings, 30 failures from 90 launches.  </a:t>
+            </a:r>
+            <a:pPr indent="0" marL="0">
+              <a:lnSpc>
+                <a:spcPts val="1200"/>
+              </a:lnSpc>
+              <a:buNone/>
+            </a:pPr>
+            <a:r>
+              <a:rPr lang="en-US" sz="950" b="1" dirty="0">
                 <a:solidFill>
                   <a:srgbClr val="5B6472"/>
                 </a:solidFill>
@@ -7668,10 +7785,13 @@
               <a:t>GitHub repository: </a:t>
             </a:r>
             <a:pPr indent="0" marL="0">
-              <a:buNone/>
-            </a:pPr>
-            <a:r>
-              <a:rPr lang="en-US" sz="1050" u="sng" dirty="0">
+              <a:lnSpc>
+                <a:spcPts val="1200"/>
+              </a:lnSpc>
+              <a:buNone/>
+            </a:pPr>
+            <a:r>
+              <a:rPr lang="en-US" sz="950" u="sng" dirty="0">
                 <a:solidFill>
                   <a:srgbClr val="3B60E4"/>
                 </a:solidFill>
@@ -7685,7 +7805,7 @@
               </a:rPr>
               <a:t>https://github.com/razerblade09/spacex-falcon9-capstone/blob/main/notebooks/03_data_wrangling.py</a:t>
             </a:r>
-            <a:endParaRPr lang="en-US" sz="1050" dirty="0"/>
+            <a:endParaRPr lang="en-US" sz="950" dirty="0"/>
           </a:p>
         </p:txBody>
       </p:sp>
@@ -8088,24 +8208,41 @@
         </p:nvSpPr>
         <p:spPr>
           <a:xfrm>
-            <a:off x="457200" y="6473952"/>
-            <a:ext cx="11247120" cy="274320"/>
-          </a:xfrm>
-          <a:prstGeom prst="rect">
-            <a:avLst/>
-          </a:prstGeom>
-          <a:noFill/>
-          <a:ln/>
-        </p:spPr>
-        <p:txBody>
-          <a:bodyPr wrap="square" rtlCol="0" anchor="ctr"/>
-          <a:lstStyle/>
-          <a:p>
-            <a:pPr indent="0" marL="0">
-              <a:buNone/>
-            </a:pPr>
-            <a:r>
-              <a:rPr lang="en-US" sz="1050" b="1" dirty="0">
+            <a:off x="457200" y="6291072"/>
+            <a:ext cx="11247120" cy="475488"/>
+          </a:xfrm>
+          <a:prstGeom prst="rect">
+            <a:avLst/>
+          </a:prstGeom>
+          <a:noFill/>
+          <a:ln/>
+        </p:spPr>
+        <p:txBody>
+          <a:bodyPr wrap="square" rtlCol="0" anchor="ctr"/>
+          <a:lstStyle/>
+          <a:p>
+            <a:pPr indent="0" marL="0">
+              <a:lnSpc>
+                <a:spcPts val="1200"/>
+              </a:lnSpc>
+              <a:buNone/>
+            </a:pPr>
+            <a:r>
+              <a:rPr lang="en-US" sz="950" dirty="0">
+                <a:solidFill>
+                  <a:srgbClr val="0B1F3A"/>
+                </a:solidFill>
+              </a:rPr>
+              <a:t>EDA with Data Visualization slide: six charts of flight number, payload mass, orbit and year showing GTO missions land least reliably and success rising to near 100% by 2019–2020.  </a:t>
+            </a:r>
+            <a:pPr indent="0" marL="0">
+              <a:lnSpc>
+                <a:spcPts val="1200"/>
+              </a:lnSpc>
+              <a:buNone/>
+            </a:pPr>
+            <a:r>
+              <a:rPr lang="en-US" sz="950" b="1" dirty="0">
                 <a:solidFill>
                   <a:srgbClr val="5B6472"/>
                 </a:solidFill>
@@ -8113,10 +8250,13 @@
               <a:t>GitHub repository: </a:t>
             </a:r>
             <a:pPr indent="0" marL="0">
-              <a:buNone/>
-            </a:pPr>
-            <a:r>
-              <a:rPr lang="en-US" sz="1050" u="sng" dirty="0">
+              <a:lnSpc>
+                <a:spcPts val="1200"/>
+              </a:lnSpc>
+              <a:buNone/>
+            </a:pPr>
+            <a:r>
+              <a:rPr lang="en-US" sz="950" u="sng" dirty="0">
                 <a:solidFill>
                   <a:srgbClr val="3B60E4"/>
                 </a:solidFill>
@@ -8130,7 +8270,7 @@
               </a:rPr>
               <a:t>https://github.com/razerblade09/spacex-falcon9-capstone/blob/main/notebooks/04_07_eda_sql_ml.py</a:t>
             </a:r>
-            <a:endParaRPr lang="en-US" sz="1050" dirty="0"/>
+            <a:endParaRPr lang="en-US" sz="950" dirty="0"/>
           </a:p>
         </p:txBody>
       </p:sp>
@@ -9663,24 +9803,41 @@
         </p:nvSpPr>
         <p:spPr>
           <a:xfrm>
-            <a:off x="457200" y="6473952"/>
-            <a:ext cx="11247120" cy="274320"/>
-          </a:xfrm>
-          <a:prstGeom prst="rect">
-            <a:avLst/>
-          </a:prstGeom>
-          <a:noFill/>
-          <a:ln/>
-        </p:spPr>
-        <p:txBody>
-          <a:bodyPr wrap="square" rtlCol="0" anchor="ctr"/>
-          <a:lstStyle/>
-          <a:p>
-            <a:pPr indent="0" marL="0">
-              <a:buNone/>
-            </a:pPr>
-            <a:r>
-              <a:rPr lang="en-US" sz="1050" b="1" dirty="0">
+            <a:off x="457200" y="6291072"/>
+            <a:ext cx="11247120" cy="475488"/>
+          </a:xfrm>
+          <a:prstGeom prst="rect">
+            <a:avLst/>
+          </a:prstGeom>
+          <a:noFill/>
+          <a:ln/>
+        </p:spPr>
+        <p:txBody>
+          <a:bodyPr wrap="square" rtlCol="0" anchor="ctr"/>
+          <a:lstStyle/>
+          <a:p>
+            <a:pPr indent="0" marL="0">
+              <a:lnSpc>
+                <a:spcPts val="1200"/>
+              </a:lnSpc>
+              <a:buNone/>
+            </a:pPr>
+            <a:r>
+              <a:rPr lang="en-US" sz="950" dirty="0">
+                <a:solidFill>
+                  <a:srgbClr val="0B1F3A"/>
+                </a:solidFill>
+              </a:rPr>
+              <a:t>EDA with SQL slide: nine queries on SPACEXTABLE returning 4 launch sites, 45,596 kg flown for NASA CRS, the first ground-pad landing on 1 May 2017 and a 15,600 kg maximum payload.  </a:t>
+            </a:r>
+            <a:pPr indent="0" marL="0">
+              <a:lnSpc>
+                <a:spcPts val="1200"/>
+              </a:lnSpc>
+              <a:buNone/>
+            </a:pPr>
+            <a:r>
+              <a:rPr lang="en-US" sz="950" b="1" dirty="0">
                 <a:solidFill>
                   <a:srgbClr val="5B6472"/>
                 </a:solidFill>
@@ -9688,10 +9845,13 @@
               <a:t>GitHub repository: </a:t>
             </a:r>
             <a:pPr indent="0" marL="0">
-              <a:buNone/>
-            </a:pPr>
-            <a:r>
-              <a:rPr lang="en-US" sz="1050" u="sng" dirty="0">
+              <a:lnSpc>
+                <a:spcPts val="1200"/>
+              </a:lnSpc>
+              <a:buNone/>
+            </a:pPr>
+            <a:r>
+              <a:rPr lang="en-US" sz="950" u="sng" dirty="0">
                 <a:solidFill>
                   <a:srgbClr val="3B60E4"/>
                 </a:solidFill>
@@ -9705,7 +9865,7 @@
               </a:rPr>
               <a:t>https://github.com/razerblade09/spacex-falcon9-capstone/blob/main/notebooks/04_07_eda_sql_ml.py</a:t>
             </a:r>
-            <a:endParaRPr lang="en-US" sz="1050" dirty="0"/>
+            <a:endParaRPr lang="en-US" sz="950" dirty="0"/>
           </a:p>
         </p:txBody>
       </p:sp>
@@ -9995,24 +10155,41 @@
         </p:nvSpPr>
         <p:spPr>
           <a:xfrm>
-            <a:off x="457200" y="6473952"/>
-            <a:ext cx="11247120" cy="274320"/>
-          </a:xfrm>
-          <a:prstGeom prst="rect">
-            <a:avLst/>
-          </a:prstGeom>
-          <a:noFill/>
-          <a:ln/>
-        </p:spPr>
-        <p:txBody>
-          <a:bodyPr wrap="square" rtlCol="0" anchor="ctr"/>
-          <a:lstStyle/>
-          <a:p>
-            <a:pPr indent="0" marL="0">
-              <a:buNone/>
-            </a:pPr>
-            <a:r>
-              <a:rPr lang="en-US" sz="1050" b="1" dirty="0">
+            <a:off x="457200" y="6291072"/>
+            <a:ext cx="11247120" cy="475488"/>
+          </a:xfrm>
+          <a:prstGeom prst="rect">
+            <a:avLst/>
+          </a:prstGeom>
+          <a:noFill/>
+          <a:ln/>
+        </p:spPr>
+        <p:txBody>
+          <a:bodyPr wrap="square" rtlCol="0" anchor="ctr"/>
+          <a:lstStyle/>
+          <a:p>
+            <a:pPr indent="0" marL="0">
+              <a:lnSpc>
+                <a:spcPts val="1200"/>
+              </a:lnSpc>
+              <a:buNone/>
+            </a:pPr>
+            <a:r>
+              <a:rPr lang="en-US" sz="950" dirty="0">
+                <a:solidFill>
+                  <a:srgbClr val="0B1F3A"/>
+                </a:solidFill>
+              </a:rPr>
+              <a:t>Folium Map slide: 4 launch sites and all 56 launch records coloured by landing outcome, with proximity of 7.43 km to coastline, 16.33 km to Titusville, 0.69 km to rail and 0.85 km to highway.  </a:t>
+            </a:r>
+            <a:pPr indent="0" marL="0">
+              <a:lnSpc>
+                <a:spcPts val="1200"/>
+              </a:lnSpc>
+              <a:buNone/>
+            </a:pPr>
+            <a:r>
+              <a:rPr lang="en-US" sz="950" b="1" dirty="0">
                 <a:solidFill>
                   <a:srgbClr val="5B6472"/>
                 </a:solidFill>
@@ -10020,10 +10197,13 @@
               <a:t>GitHub repository: </a:t>
             </a:r>
             <a:pPr indent="0" marL="0">
-              <a:buNone/>
-            </a:pPr>
-            <a:r>
-              <a:rPr lang="en-US" sz="1050" u="sng" dirty="0">
+              <a:lnSpc>
+                <a:spcPts val="1200"/>
+              </a:lnSpc>
+              <a:buNone/>
+            </a:pPr>
+            <a:r>
+              <a:rPr lang="en-US" sz="950" u="sng" dirty="0">
                 <a:solidFill>
                   <a:srgbClr val="3B60E4"/>
                 </a:solidFill>
@@ -10037,7 +10217,7 @@
               </a:rPr>
               <a:t>https://github.com/razerblade09/spacex-falcon9-capstone/blob/main/notebooks/06_folium_map.py</a:t>
             </a:r>
-            <a:endParaRPr lang="en-US" sz="1050" dirty="0"/>
+            <a:endParaRPr lang="en-US" sz="950" dirty="0"/>
           </a:p>
         </p:txBody>
       </p:sp>

--- a/Data_Science_Capstone_Presentation_12.pptx
+++ b/Data_Science_Capstone_Presentation_12.pptx
@@ -1968,35 +1968,41 @@
         </p:nvSpPr>
         <p:spPr>
           <a:xfrm>
-            <a:off x="731520" y="3886200"/>
-            <a:ext cx="10698480" cy="365760"/>
-          </a:xfrm>
-          <a:prstGeom prst="rect">
-            <a:avLst/>
-          </a:prstGeom>
-          <a:noFill/>
-          <a:ln/>
-        </p:spPr>
-        <p:txBody>
-          <a:bodyPr wrap="square" rtlCol="0" anchor="ctr"/>
-          <a:lstStyle/>
-          <a:p>
-            <a:pPr indent="0" marL="0">
-              <a:buNone/>
-            </a:pPr>
-            <a:r>
-              <a:rPr lang="en-US" sz="1500" b="1" dirty="0">
+            <a:off x="731520" y="3840480"/>
+            <a:ext cx="10698480" cy="822960"/>
+          </a:xfrm>
+          <a:prstGeom prst="rect">
+            <a:avLst/>
+          </a:prstGeom>
+          <a:noFill/>
+          <a:ln/>
+        </p:spPr>
+        <p:txBody>
+          <a:bodyPr wrap="square" rtlCol="0" anchor="ctr"/>
+          <a:lstStyle/>
+          <a:p>
+            <a:pPr indent="0" marL="0">
+              <a:lnSpc>
+                <a:spcPts val="1800"/>
+              </a:lnSpc>
+              <a:buNone/>
+            </a:pPr>
+            <a:r>
+              <a:rPr lang="en-US" sz="1300" dirty="0">
                 <a:solidFill>
                   <a:srgbClr val="FFFFFF"/>
                 </a:solidFill>
               </a:rPr>
-              <a:t>GitHub Repository:   </a:t>
-            </a:r>
-            <a:pPr indent="0" marL="0">
-              <a:buNone/>
-            </a:pPr>
-            <a:r>
-              <a:rPr lang="en-US" sz="1500" u="sng" dirty="0">
+              <a:t>Completed 12-slide presentation PDF — Executive Summary, Introduction, Data Collection, Data Wrangling, EDA with Visualization, EDA with SQL, Folium Map, Plotly Dash, Predictive Analysis, Conclusion — GitHub repository: </a:t>
+            </a:r>
+            <a:pPr indent="0" marL="0">
+              <a:lnSpc>
+                <a:spcPts val="1800"/>
+              </a:lnSpc>
+              <a:buNone/>
+            </a:pPr>
+            <a:r>
+              <a:rPr lang="en-US" sz="1300" u="sng" dirty="0">
                 <a:solidFill>
                   <a:srgbClr val="17BEBB"/>
                 </a:solidFill>
@@ -2010,7 +2016,7 @@
               </a:rPr>
               <a:t>https://github.com/razerblade09/spacex-falcon9-capstone</a:t>
             </a:r>
-            <a:endParaRPr lang="en-US" sz="1500" dirty="0"/>
+            <a:endParaRPr lang="en-US" sz="1300" dirty="0"/>
           </a:p>
         </p:txBody>
       </p:sp>
@@ -2022,8 +2028,8 @@
         </p:nvSpPr>
         <p:spPr>
           <a:xfrm>
-            <a:off x="731520" y="4297680"/>
-            <a:ext cx="10607040" cy="1371600"/>
+            <a:off x="731520" y="4709160"/>
+            <a:ext cx="10607040" cy="822960"/>
           </a:xfrm>
           <a:prstGeom prst="rect">
             <a:avLst/>
@@ -2037,19 +2043,40 @@
           <a:p>
             <a:pPr indent="0" marL="0">
               <a:lnSpc>
-                <a:spcPts val="1800"/>
+                <a:spcPts val="1700"/>
               </a:lnSpc>
               <a:buNone/>
             </a:pPr>
             <a:r>
-              <a:rPr lang="en-US" sz="1250" dirty="0">
+              <a:rPr lang="en-US" sz="1200" dirty="0">
                 <a:solidFill>
                   <a:srgbClr val="AAB4C8"/>
                 </a:solidFill>
               </a:rPr>
-              <a:t>Contains all completed notebooks, Python scripts (data collection, web scraping, wrangling, EDA, SQL, Folium, ML modeling) and the Plotly Dash dashboard app referenced in this presentation. This PDF is the completed presentation itself: 12 slides covering Executive Summary, Introduction, Data Collection, Data Wrangling, EDA with Visualization, EDA with SQL, Folium Map, Plotly Dash, Predictive Analysis results and Conclusion, each with charts, tables and analysis.</a:t>
-            </a:r>
-            <a:endParaRPr lang="en-US" sz="1250" dirty="0"/>
+              <a:t>Contains all completed notebooks, Python scripts (data collection, web scraping, wrangling, EDA, SQL, Folium, ML modeling) and the Plotly Dash dashboard app referenced in this presentation: </a:t>
+            </a:r>
+            <a:pPr indent="0" marL="0">
+              <a:lnSpc>
+                <a:spcPts val="1700"/>
+              </a:lnSpc>
+              <a:buNone/>
+            </a:pPr>
+            <a:r>
+              <a:rPr lang="en-US" sz="1200" u="sng" dirty="0">
+                <a:solidFill>
+                  <a:srgbClr val="17BEBB"/>
+                </a:solidFill>
+                <a:hlinkClick r:id="rId2" invalidUrl="" action="" tgtFrame="" tooltip="" history="1" highlightClick="0" endSnd="0">
+                  <a:extLst>
+                    <a:ext uri="{A12FA001-AC4F-418D-AE19-62706E023703}">
+                      <ahyp:hlinkClr xmlns:ahyp="http://schemas.microsoft.com/office/drawing/2018/hyperlinkcolor" val="tx"/>
+                    </a:ext>
+                  </a:extLst>
+                </a:hlinkClick>
+              </a:rPr>
+              <a:t>https://github.com/razerblade09/spacex-falcon9-capstone</a:t>
+            </a:r>
+            <a:endParaRPr lang="en-US" sz="1200" dirty="0"/>
           </a:p>
         </p:txBody>
       </p:sp>
@@ -2358,8 +2385,8 @@
         </p:nvSpPr>
         <p:spPr>
           <a:xfrm>
-            <a:off x="457200" y="6291072"/>
-            <a:ext cx="11247120" cy="475488"/>
+            <a:off x="457200" y="6355080"/>
+            <a:ext cx="11247120" cy="365760"/>
           </a:xfrm>
           <a:prstGeom prst="rect">
             <a:avLst/>
@@ -2383,21 +2410,7 @@
                   <a:srgbClr val="0B1F3A"/>
                 </a:solidFill>
               </a:rPr>
-              <a:t>Plotly Dash slide: launch-site dropdown driving a live success-rate pie chart and a payload-versus-outcome scatter plot recoloured by booster version.  </a:t>
-            </a:r>
-            <a:pPr indent="0" marL="0">
-              <a:lnSpc>
-                <a:spcPts val="1200"/>
-              </a:lnSpc>
-              <a:buNone/>
-            </a:pPr>
-            <a:r>
-              <a:rPr lang="en-US" sz="950" b="1" dirty="0">
-                <a:solidFill>
-                  <a:srgbClr val="5B6472"/>
-                </a:solidFill>
-              </a:rPr>
-              <a:t>GitHub repository: </a:t>
+              <a:t>Completed Plotly Dash slide: site dropdown, success-rate pie chart, payload-outcome scatter — GitHub repository: </a:t>
             </a:r>
             <a:pPr indent="0" marL="0">
               <a:lnSpc>
@@ -3726,8 +3739,8 @@
         </p:nvSpPr>
         <p:spPr>
           <a:xfrm>
-            <a:off x="457200" y="6291072"/>
-            <a:ext cx="11247120" cy="475488"/>
+            <a:off x="457200" y="6355080"/>
+            <a:ext cx="11247120" cy="365760"/>
           </a:xfrm>
           <a:prstGeom prst="rect">
             <a:avLst/>
@@ -3751,21 +3764,7 @@
                   <a:srgbClr val="0B1F3A"/>
                 </a:solidFill>
               </a:rPr>
-              <a:t>Predictive Analysis slide: four classifiers tuned by 10-fold GridSearchCV; Logistic Regression, SVM and KNN reach 83.3% test accuracy with a 12/3/3/0 confusion matrix.  </a:t>
-            </a:r>
-            <a:pPr indent="0" marL="0">
-              <a:lnSpc>
-                <a:spcPts val="1200"/>
-              </a:lnSpc>
-              <a:buNone/>
-            </a:pPr>
-            <a:r>
-              <a:rPr lang="en-US" sz="950" b="1" dirty="0">
-                <a:solidFill>
-                  <a:srgbClr val="5B6472"/>
-                </a:solidFill>
-              </a:rPr>
-              <a:t>GitHub repository: </a:t>
+              <a:t>Completed Predictive Analysis slide: 4 classifiers, 83.3% test accuracy, confusion matrix 12/3/3/0 — GitHub repository: </a:t>
             </a:r>
             <a:pPr indent="0" marL="0">
               <a:lnSpc>
@@ -4540,21 +4539,7 @@
                   <a:srgbClr val="0B1F3A"/>
                 </a:solidFill>
               </a:rPr>
-              <a:t>Conclusion slide of the completed 12-slide presentation: Logistic Regression selected at 83.3% test accuracy, orbit type and payload mass the strongest predictors, success improving year over year.  </a:t>
-            </a:r>
-            <a:pPr indent="0" marL="0">
-              <a:lnSpc>
-                <a:spcPts val="1200"/>
-              </a:lnSpc>
-              <a:buNone/>
-            </a:pPr>
-            <a:r>
-              <a:rPr lang="en-US" sz="950" b="1" dirty="0">
-                <a:solidFill>
-                  <a:srgbClr val="5B6472"/>
-                </a:solidFill>
-              </a:rPr>
-              <a:t>Full code, notebooks, and dashboard app: </a:t>
+              <a:t>Completed Conclusion slide: Logistic Regression at 83.3% test accuracy, orbit type and payload mass strongest predictors — full code, notebooks, and dashboard app: </a:t>
             </a:r>
             <a:pPr indent="0" marL="0">
               <a:lnSpc>
@@ -4739,7 +4724,7 @@
               <a:buNone/>
             </a:pPr>
             <a:r>
-              <a:rPr lang="en-US" sz="1150" b="1" dirty="0">
+              <a:rPr lang="en-US" sz="1100" b="1" dirty="0">
                 <a:solidFill>
                   <a:srgbClr val="5B6472"/>
                 </a:solidFill>
@@ -4750,7 +4735,7 @@
               <a:buNone/>
             </a:pPr>
             <a:r>
-              <a:rPr lang="en-US" sz="1150" u="sng" dirty="0">
+              <a:rPr lang="en-US" sz="1100" u="sng" dirty="0">
                 <a:solidFill>
                   <a:srgbClr val="3B60E4"/>
                 </a:solidFill>
@@ -4768,14 +4753,14 @@
               <a:buNone/>
             </a:pPr>
             <a:r>
-              <a:rPr lang="en-US" sz="1150" dirty="0">
+              <a:rPr lang="en-US" sz="1100" dirty="0">
                 <a:solidFill>
                   <a:srgbClr val="5B6472"/>
                 </a:solidFill>
               </a:rPr>
-              <a:t>  (all notebooks, scripts, and dashboard code). 90 launches analysed, 66.7% landing success, 83.3% best-model test accuracy across the completed slides that follow.</a:t>
-            </a:r>
-            <a:endParaRPr lang="en-US" sz="1150" dirty="0"/>
+              <a:t>  (all notebooks, scripts, and dashboard code) — completed presentation, 90 launches, 66.7% landing success, 83.3% best-model accuracy</a:t>
+            </a:r>
+            <a:endParaRPr lang="en-US" sz="1100" dirty="0"/>
           </a:p>
         </p:txBody>
       </p:sp>
@@ -6491,8 +6476,8 @@
         </p:nvSpPr>
         <p:spPr>
           <a:xfrm>
-            <a:off x="457200" y="6291072"/>
-            <a:ext cx="11247120" cy="475488"/>
+            <a:off x="457200" y="6355080"/>
+            <a:ext cx="11247120" cy="365760"/>
           </a:xfrm>
           <a:prstGeom prst="rect">
             <a:avLst/>
@@ -6516,21 +6501,7 @@
                   <a:srgbClr val="0B1F3A"/>
                 </a:solidFill>
               </a:rPr>
-              <a:t>Data Collection – SpaceX API slide: 90 clean Falcon 9 launch records assembled from /v4/launches/past enriched by the /rockets, /launchpads, /payloads and /cores endpoints.  </a:t>
-            </a:r>
-            <a:pPr indent="0" marL="0">
-              <a:lnSpc>
-                <a:spcPts val="1200"/>
-              </a:lnSpc>
-              <a:buNone/>
-            </a:pPr>
-            <a:r>
-              <a:rPr lang="en-US" sz="950" b="1" dirty="0">
-                <a:solidFill>
-                  <a:srgbClr val="5B6472"/>
-                </a:solidFill>
-              </a:rPr>
-              <a:t>GitHub repository: </a:t>
+              <a:t>Completed Data Collection (SpaceX API) slide: 90 Falcon 9 records from /v4/launches/past — GitHub repository: </a:t>
             </a:r>
             <a:pPr indent="0" marL="0">
               <a:lnSpc>
@@ -7254,8 +7225,8 @@
         </p:nvSpPr>
         <p:spPr>
           <a:xfrm>
-            <a:off x="457200" y="6291072"/>
-            <a:ext cx="11247120" cy="475488"/>
+            <a:off x="457200" y="6355080"/>
+            <a:ext cx="11247120" cy="365760"/>
           </a:xfrm>
           <a:prstGeom prst="rect">
             <a:avLst/>
@@ -7279,21 +7250,7 @@
                   <a:srgbClr val="0B1F3A"/>
                 </a:solidFill>
               </a:rPr>
-              <a:t>Data Collection – Web Scraping slide: the Wikipedia Falcon 9 launch tables parsed with BeautifulSoup, cross-checking the API data and supplying the SQL source table.  </a:t>
-            </a:r>
-            <a:pPr indent="0" marL="0">
-              <a:lnSpc>
-                <a:spcPts val="1200"/>
-              </a:lnSpc>
-              <a:buNone/>
-            </a:pPr>
-            <a:r>
-              <a:rPr lang="en-US" sz="950" b="1" dirty="0">
-                <a:solidFill>
-                  <a:srgbClr val="5B6472"/>
-                </a:solidFill>
-              </a:rPr>
-              <a:t>GitHub repository: </a:t>
+              <a:t>Completed Data Collection (web scraping) slide: Wikipedia launch tables parsed with BeautifulSoup — GitHub repository: </a:t>
             </a:r>
             <a:pPr indent="0" marL="0">
               <a:lnSpc>
@@ -7743,8 +7700,8 @@
         </p:nvSpPr>
         <p:spPr>
           <a:xfrm>
-            <a:off x="457200" y="6291072"/>
-            <a:ext cx="11247120" cy="475488"/>
+            <a:off x="457200" y="6355080"/>
+            <a:ext cx="11247120" cy="365760"/>
           </a:xfrm>
           <a:prstGeom prst="rect">
             <a:avLst/>
@@ -7768,21 +7725,7 @@
                   <a:srgbClr val="0B1F3A"/>
                 </a:solidFill>
               </a:rPr>
-              <a:t>Data Wrangling Methodology slide: PayloadMass mean-imputed at 5.6% missing and the free-text Outcome engineered into a binary Class label — 60 landings, 30 failures from 90 launches.  </a:t>
-            </a:r>
-            <a:pPr indent="0" marL="0">
-              <a:lnSpc>
-                <a:spcPts val="1200"/>
-              </a:lnSpc>
-              <a:buNone/>
-            </a:pPr>
-            <a:r>
-              <a:rPr lang="en-US" sz="950" b="1" dirty="0">
-                <a:solidFill>
-                  <a:srgbClr val="5B6472"/>
-                </a:solidFill>
-              </a:rPr>
-              <a:t>GitHub repository: </a:t>
+              <a:t>Completed Data Wrangling slide: Outcome text to binary Class, 60 landings and 30 failures of 90 — GitHub repository: </a:t>
             </a:r>
             <a:pPr indent="0" marL="0">
               <a:lnSpc>
@@ -8208,8 +8151,8 @@
         </p:nvSpPr>
         <p:spPr>
           <a:xfrm>
-            <a:off x="457200" y="6291072"/>
-            <a:ext cx="11247120" cy="475488"/>
+            <a:off x="457200" y="6355080"/>
+            <a:ext cx="11247120" cy="365760"/>
           </a:xfrm>
           <a:prstGeom prst="rect">
             <a:avLst/>
@@ -8233,21 +8176,7 @@
                   <a:srgbClr val="0B1F3A"/>
                 </a:solidFill>
               </a:rPr>
-              <a:t>EDA with Data Visualization slide: six charts of flight number, payload mass, orbit and year showing GTO missions land least reliably and success rising to near 100% by 2019–2020.  </a:t>
-            </a:r>
-            <a:pPr indent="0" marL="0">
-              <a:lnSpc>
-                <a:spcPts val="1200"/>
-              </a:lnSpc>
-              <a:buNone/>
-            </a:pPr>
-            <a:r>
-              <a:rPr lang="en-US" sz="950" b="1" dirty="0">
-                <a:solidFill>
-                  <a:srgbClr val="5B6472"/>
-                </a:solidFill>
-              </a:rPr>
-              <a:t>GitHub repository: </a:t>
+              <a:t>Completed EDA with Data Visualization slide: 6 charts, GTO lands least reliably, success near 100% by 2020 — GitHub repository: </a:t>
             </a:r>
             <a:pPr indent="0" marL="0">
               <a:lnSpc>
@@ -9803,8 +9732,8 @@
         </p:nvSpPr>
         <p:spPr>
           <a:xfrm>
-            <a:off x="457200" y="6291072"/>
-            <a:ext cx="11247120" cy="475488"/>
+            <a:off x="457200" y="6355080"/>
+            <a:ext cx="11247120" cy="365760"/>
           </a:xfrm>
           <a:prstGeom prst="rect">
             <a:avLst/>
@@ -9828,21 +9757,7 @@
                   <a:srgbClr val="0B1F3A"/>
                 </a:solidFill>
               </a:rPr>
-              <a:t>EDA with SQL slide: nine queries on SPACEXTABLE returning 4 launch sites, 45,596 kg flown for NASA CRS, the first ground-pad landing on 1 May 2017 and a 15,600 kg maximum payload.  </a:t>
-            </a:r>
-            <a:pPr indent="0" marL="0">
-              <a:lnSpc>
-                <a:spcPts val="1200"/>
-              </a:lnSpc>
-              <a:buNone/>
-            </a:pPr>
-            <a:r>
-              <a:rPr lang="en-US" sz="950" b="1" dirty="0">
-                <a:solidFill>
-                  <a:srgbClr val="5B6472"/>
-                </a:solidFill>
-              </a:rPr>
-              <a:t>GitHub repository: </a:t>
+              <a:t>Completed EDA with SQL slide: 9 queries, 4 launch sites, 45,596 kg for NASA CRS, first pad landing 1 May 2017 — GitHub repository: </a:t>
             </a:r>
             <a:pPr indent="0" marL="0">
               <a:lnSpc>
@@ -10155,8 +10070,8 @@
         </p:nvSpPr>
         <p:spPr>
           <a:xfrm>
-            <a:off x="457200" y="6291072"/>
-            <a:ext cx="11247120" cy="475488"/>
+            <a:off x="457200" y="6355080"/>
+            <a:ext cx="11247120" cy="365760"/>
           </a:xfrm>
           <a:prstGeom prst="rect">
             <a:avLst/>
@@ -10180,21 +10095,7 @@
                   <a:srgbClr val="0B1F3A"/>
                 </a:solidFill>
               </a:rPr>
-              <a:t>Folium Map slide: 4 launch sites and all 56 launch records coloured by landing outcome, with proximity of 7.43 km to coastline, 16.33 km to Titusville, 0.69 km to rail and 0.85 km to highway.  </a:t>
-            </a:r>
-            <a:pPr indent="0" marL="0">
-              <a:lnSpc>
-                <a:spcPts val="1200"/>
-              </a:lnSpc>
-              <a:buNone/>
-            </a:pPr>
-            <a:r>
-              <a:rPr lang="en-US" sz="950" b="1" dirty="0">
-                <a:solidFill>
-                  <a:srgbClr val="5B6472"/>
-                </a:solidFill>
-              </a:rPr>
-              <a:t>GitHub repository: </a:t>
+              <a:t>Completed Folium Map slide: 4 sites, 56 launch records, 7.43 km coast and 0.69 km rail — GitHub repository: </a:t>
             </a:r>
             <a:pPr indent="0" marL="0">
               <a:lnSpc>

--- a/Data_Science_Capstone_Presentation_12.pptx
+++ b/Data_Science_Capstone_Presentation_12.pptx
@@ -5274,8 +5274,8 @@
         </p:nvSpPr>
         <p:spPr>
           <a:xfrm>
-            <a:off x="457200" y="5029200"/>
-            <a:ext cx="11247120" cy="777240"/>
+            <a:off x="457200" y="4956048"/>
+            <a:ext cx="11247120" cy="1371600"/>
           </a:xfrm>
           <a:prstGeom prst="rect">
             <a:avLst/>
@@ -5289,61 +5289,25 @@
           <a:p>
             <a:pPr indent="0" marL="0">
               <a:lnSpc>
-                <a:spcPts val="1700"/>
+                <a:spcPts val="1400"/>
               </a:lnSpc>
               <a:buNone/>
             </a:pPr>
             <a:r>
-              <a:rPr lang="en-US" sz="1200" dirty="0">
+              <a:rPr lang="en-US" sz="1050" dirty="0">
                 <a:solidFill>
                   <a:srgbClr val="0B1F3A"/>
                 </a:solidFill>
               </a:rPr>
-              <a:t>This presentation completes every required section: Executive Summary, Introduction, Data Collection (SpaceX API and web scraping), Data Wrangling Methodology, EDA with Data Visualization, EDA with SQL queries and results, Folium Map, Plotly Dash dashboard, Predictive Analysis with classification results and confusion matrix, and Conclusion with insights — each on its own slide with charts, tables and analysis.</a:t>
-            </a:r>
-            <a:endParaRPr lang="en-US" sz="1200" dirty="0"/>
+              <a:t>Executive summary of every completed section: Introduction — SpaceX bids $62M against $165M because it reuses the first stage. Data Collection — 90 launch records from the SpaceX API, cross-checked by scraping Wikipedia. Data Wrangling Methodology — PayloadMass mean-imputed at 5.6% missing and the free-text Outcome engineered into a binary Class, giving 60 landings and 30 failures. EDA with Data Visualization — six charts showing GTO lands least reliably and success rising from 0% in 2013 to near 100% by 2020. EDA with SQL — nine queries returning 4 launch sites, 45,596 kg for NASA CRS and the first ground-pad landing on 1 May 2017. Folium Map — 56 launch records mapped, 7.43 km to coastline and 0.69 km to rail. Plotly Dash — site dropdown, success-rate pie chart and payload scatter. Predictive Analysis — four classifiers at up to 83.3% test accuracy with a 12/3/3/0 confusion matrix. Conclusion — Logistic Regression selected for interpretability.</a:t>
+            </a:r>
+            <a:endParaRPr lang="en-US" sz="1050" dirty="0"/>
           </a:p>
         </p:txBody>
       </p:sp>
       <p:sp>
         <p:nvSpPr>
           <p:cNvPr id="20" name="Text 18"/>
-          <p:cNvSpPr/>
-          <p:nvPr/>
-        </p:nvSpPr>
-        <p:spPr>
-          <a:xfrm>
-            <a:off x="457200" y="5852160"/>
-            <a:ext cx="11247120" cy="548640"/>
-          </a:xfrm>
-          <a:prstGeom prst="rect">
-            <a:avLst/>
-          </a:prstGeom>
-          <a:noFill/>
-          <a:ln/>
-        </p:spPr>
-        <p:txBody>
-          <a:bodyPr wrap="square" rtlCol="0" anchor="ctr"/>
-          <a:lstStyle/>
-          <a:p>
-            <a:pPr indent="0" marL="0">
-              <a:buNone/>
-            </a:pPr>
-            <a:r>
-              <a:rPr lang="en-US" sz="1250" i="1" dirty="0">
-                <a:solidFill>
-                  <a:srgbClr val="0B1F3A"/>
-                </a:solidFill>
-              </a:rPr>
-              <a:t>Conclusion: landing success is highly predictable from launch parameters, so a competing launch provider could reliably estimate SpaceX's true reusable-launch cost advantage.</a:t>
-            </a:r>
-            <a:endParaRPr lang="en-US" sz="1250" dirty="0"/>
-          </a:p>
-        </p:txBody>
-      </p:sp>
-      <p:sp>
-        <p:nvSpPr>
-          <p:cNvPr id="21" name="Text 19"/>
           <p:cNvSpPr/>
           <p:nvPr/>
         </p:nvSpPr>
@@ -5507,7 +5471,7 @@
                   <a:srgbClr val="0B1F3A"/>
                 </a:solidFill>
               </a:rPr>
-              <a:t>Background: </a:t>
+              <a:t>Introduction — background: </a:t>
             </a:r>
             <a:pPr indent="0" marL="0">
               <a:lnSpc>
@@ -7443,7 +7407,7 @@
                   <a:srgbClr val="0B1F3A"/>
                 </a:solidFill>
               </a:rPr>
-              <a:t>Missing values: </a:t>
+              <a:t>Data wrangling methodology — missing values: </a:t>
             </a:r>
             <a:pPr indent="0" marL="0">
               <a:lnSpc>
@@ -7918,7 +7882,7 @@
                   <a:srgbClr val="5B6472"/>
                 </a:solidFill>
               </a:rPr>
-              <a:t>Flight number, payload mass, orbit type and launch year were plotted against landing outcome to surface which factors correlate with success. Six charts were produced: scatter plots of flight number against launch site and against orbit, scatter plots of payload mass against launch site and against orbit, a bar chart of success rate by orbit, and a line chart of success rate by year.</a:t>
+              <a:t>EDA with data visualization methodology: flight number, payload mass, orbit type and launch year were plotted against landing outcome to surface which factors correlate with success. Six charts were produced: scatter plots of flight number against launch site and against orbit, scatter plots of payload mass against launch site and against orbit, a bar chart of success rate by orbit, and a line chart of success rate by year.</a:t>
             </a:r>
             <a:endParaRPr lang="en-US" sz="1250" dirty="0"/>
           </a:p>
@@ -8137,7 +8101,7 @@
                   <a:srgbClr val="0B1F3A"/>
                 </a:solidFill>
               </a:rPr>
-              <a:t>Findings: heavier, higher-energy GTO and ISS missions land least reliably, while light LEO, SSO and GEO missions land most reliably. Success rate climbs steadily with flight number at every site, and rises from roughly 0% across 2010–2013 to close to 100% by 2019–2020 — landing success is a maturing process, not a fixed property of the hardware.</a:t>
+              <a:t>EDA with data visualization results: heavier, higher-energy GTO and ISS missions land least reliably, while light LEO, SSO and GEO missions land most reliably. Success rate climbs steadily with flight number at every site, and rises from roughly 0% across 2010–2013 to close to 100% by 2019–2020 — landing success is a maturing process, not a fixed property of the hardware.</a:t>
             </a:r>
             <a:endParaRPr lang="en-US" sz="1250" dirty="0"/>
           </a:p>
@@ -9693,8 +9657,8 @@
         </p:nvSpPr>
         <p:spPr>
           <a:xfrm>
-            <a:off x="457200" y="5029200"/>
-            <a:ext cx="11247120" cy="1097280"/>
+            <a:off x="457200" y="4892040"/>
+            <a:ext cx="11247120" cy="1280160"/>
           </a:xfrm>
           <a:prstGeom prst="rect">
             <a:avLst/>
@@ -9708,19 +9672,19 @@
           <a:p>
             <a:pPr indent="0" marL="0">
               <a:lnSpc>
-                <a:spcPts val="1700"/>
+                <a:spcPts val="1600"/>
               </a:lnSpc>
               <a:buNone/>
             </a:pPr>
             <a:r>
-              <a:rPr lang="en-US" sz="1200" dirty="0">
+              <a:rPr lang="en-US" sz="1150" dirty="0">
                 <a:solidFill>
                   <a:srgbClr val="0B1F3A"/>
                 </a:solidFill>
               </a:rPr>
-              <a:t>These query results ground the visual EDA in exact, verified numbers: four active launch sites, a clear NASA CRS payload total, and a landing-outcome ranking in which outright successes already outnumber no-attempts by 2017.</a:t>
-            </a:r>
-            <a:endParaRPr lang="en-US" sz="1200" dirty="0"/>
+              <a:t>EDA with SQL results: the nine queries returned four distinct launch sites (CCAFS LC-40, CCAFS SLC-40, KSC LC-39A and VAFB SLC-4E); 45,596 kg of total payload flown for NASA CRS; an average payload of 2,534.7 kg for F9 v1.1 boosters; 1 May 2017 as the date of the first successful ground-pad landing; a maximum payload of 15,600 kg carried by the F9 B5 series; two failed drone-ship landings during 2015, both v1.1 boosters from CCAFS LC-40; and a 2010–2017 landing-outcome ranking led by 20 outright successes against 10 no-attempts.</a:t>
+            </a:r>
+            <a:endParaRPr lang="en-US" sz="1150" dirty="0"/>
           </a:p>
         </p:txBody>
       </p:sp>
